--- a/AICTE_Machine Learning_Project .pptx
+++ b/AICTE_Machine Learning_Project .pptx
@@ -263,7 +263,7 @@
       <p15:sldGuideLst xmlns:p15="http://schemas.microsoft.com/office/powerpoint/2012/main"/>
     </p:ext>
     <p:ext uri="GoogleSlidesCustomDataVersion2">
-      <go:slidesCustomData xmlns:mc="http://schemas.openxmlformats.org/markup-compatibility/2006" xmlns:mv="urn:schemas-microsoft-com:mac:vml" xmlns:c="http://schemas.openxmlformats.org/drawingml/2006/chart" xmlns:dgm="http://schemas.openxmlformats.org/drawingml/2006/diagram" xmlns:o="urn:schemas-microsoft-com:office:office" xmlns:v="urn:schemas-microsoft-com:vml" xmlns:pvml="urn:schemas-microsoft-com:office:powerpoint" xmlns:com="http://schemas.openxmlformats.org/drawingml/2006/compatibility" xmlns:p14="http://schemas.microsoft.com/office/powerpoint/2010/main" xmlns:p15="http://schemas.microsoft.com/office/powerpoint/2012/main" xmlns:ahyp="http://schemas.microsoft.com/office/drawing/2018/hyperlinkcolor" xmlns:go="http://customooxmlschemas.google.com/" xmlns="" r:id="rId27" roundtripDataSignature="AMtx7mjt3491jQ7aCoyIz2WXeHKroE7tpQ=="/>
+      <go:slidesCustomData xmlns="" xmlns:go="http://customooxmlschemas.google.com/" xmlns:ahyp="http://schemas.microsoft.com/office/drawing/2018/hyperlinkcolor" xmlns:p15="http://schemas.microsoft.com/office/powerpoint/2012/main" xmlns:p14="http://schemas.microsoft.com/office/powerpoint/2010/main" xmlns:com="http://schemas.openxmlformats.org/drawingml/2006/compatibility" xmlns:pvml="urn:schemas-microsoft-com:office:powerpoint" xmlns:v="urn:schemas-microsoft-com:vml" xmlns:o="urn:schemas-microsoft-com:office:office" xmlns:dgm="http://schemas.openxmlformats.org/drawingml/2006/diagram" xmlns:c="http://schemas.openxmlformats.org/drawingml/2006/chart" xmlns:mv="urn:schemas-microsoft-com:mac:vml" xmlns:mc="http://schemas.openxmlformats.org/markup-compatibility/2006" r:id="rId27" roundtripDataSignature="AMtx7mjt3491jQ7aCoyIz2WXeHKroE7tpQ=="/>
     </p:ext>
   </p:extLst>
 </p:presentation>
@@ -13705,7 +13705,7 @@
         </p:nvSpPr>
         <p:spPr>
           <a:xfrm>
-            <a:off x="1218724" y="420729"/>
+            <a:off x="654844" y="180494"/>
             <a:ext cx="6444496" cy="704017"/>
           </a:xfrm>
           <a:prstGeom prst="rect">
@@ -13765,8 +13765,8 @@
         </p:nvSpPr>
         <p:spPr>
           <a:xfrm>
-            <a:off x="1218724" y="1153712"/>
-            <a:ext cx="9214580" cy="4277001"/>
+            <a:off x="655320" y="1019111"/>
+            <a:ext cx="10622280" cy="5658395"/>
           </a:xfrm>
           <a:prstGeom prst="rect">
             <a:avLst/>
@@ -13782,224 +13782,99 @@
           </a:bodyPr>
           <a:lstStyle/>
           <a:p>
-            <a:pPr marL="0" marR="0" lvl="0" indent="0" algn="l" rtl="0">
-              <a:lnSpc>
-                <a:spcPct val="162162"/>
-              </a:lnSpc>
-              <a:spcBef>
-                <a:spcPts val="0"/>
-              </a:spcBef>
-              <a:spcAft>
-                <a:spcPts val="0"/>
-              </a:spcAft>
-              <a:buClr>
-                <a:srgbClr val="2B3541"/>
-              </a:buClr>
-              <a:buSzPts val="1850"/>
-              <a:buFont typeface="Times New Roman"/>
-              <a:buNone/>
-            </a:pPr>
             <a:r>
-              <a:rPr lang="en-US" sz="2400" b="0" i="0" u="none" strike="noStrike" cap="none" dirty="0">
-                <a:solidFill>
-                  <a:srgbClr val="2B3541"/>
-                </a:solidFill>
-                <a:latin typeface="Times New Roman"/>
-                <a:ea typeface="Times New Roman"/>
-                <a:cs typeface="Times New Roman"/>
-                <a:sym typeface="Times New Roman"/>
-              </a:rPr>
-              <a:t>Please create public </a:t>
-            </a:r>
-            <a:r>
-              <a:rPr lang="en-US" sz="2400" b="0" i="0" u="none" strike="noStrike" cap="none" dirty="0" err="1">
-                <a:solidFill>
-                  <a:srgbClr val="2B3541"/>
-                </a:solidFill>
-                <a:latin typeface="Times New Roman"/>
-                <a:ea typeface="Times New Roman"/>
-                <a:cs typeface="Times New Roman"/>
-                <a:sym typeface="Times New Roman"/>
-              </a:rPr>
-              <a:t>github</a:t>
-            </a:r>
-            <a:r>
-              <a:rPr lang="en-US" sz="2400" b="0" i="0" u="none" strike="noStrike" cap="none" dirty="0">
-                <a:solidFill>
-                  <a:srgbClr val="2B3541"/>
-                </a:solidFill>
-                <a:latin typeface="Times New Roman"/>
-                <a:ea typeface="Times New Roman"/>
-                <a:cs typeface="Times New Roman"/>
-                <a:sym typeface="Times New Roman"/>
-              </a:rPr>
-              <a:t> repository (Enable Add README  button while creating repository) with format – </a:t>
+              <a:rPr lang="en-IN" sz="2400" dirty="0"/>
+              <a:t>A public GitHub repository was created to host the IBM Machine Learning project. The repository includes all the required project files, such as the dataset, problem statement, project presentation, Python notebook, and README documentation.</a:t>
             </a:r>
           </a:p>
           <a:p>
-            <a:pPr marL="0" marR="0" lvl="0" indent="0" algn="l" rtl="0">
-              <a:lnSpc>
-                <a:spcPct val="162162"/>
-              </a:lnSpc>
-              <a:spcBef>
-                <a:spcPts val="0"/>
-              </a:spcBef>
-              <a:spcAft>
-                <a:spcPts val="0"/>
-              </a:spcAft>
-              <a:buClr>
-                <a:srgbClr val="2B3541"/>
-              </a:buClr>
-              <a:buSzPts val="1850"/>
-              <a:buFont typeface="Times New Roman"/>
-              <a:buNone/>
+            <a:endParaRPr lang="en-IN" sz="2400" dirty="0"/>
+          </a:p>
+          <a:p>
+            <a:r>
+              <a:rPr lang="en-IN" sz="2400" b="1" dirty="0"/>
+              <a:t>GitHub Repository Link:</a:t>
+            </a:r>
+            <a:endParaRPr lang="en-IN" sz="2400" dirty="0"/>
+          </a:p>
+          <a:p>
+            <a:r>
+              <a:rPr lang="en-IN" sz="2400" b="1" dirty="0">
+                <a:hlinkClick r:id="rId3"/>
+              </a:rPr>
+              <a:t>https://github.com/Vinayaga2605/IBM-Machine-Learning-Project</a:t>
+            </a:r>
+            <a:endParaRPr lang="en-IN" sz="2400" b="1" dirty="0"/>
+          </a:p>
+          <a:p>
+            <a:endParaRPr lang="en-IN" sz="2400" dirty="0"/>
+          </a:p>
+          <a:p>
+            <a:r>
+              <a:rPr lang="en-IN" sz="2400" b="1" dirty="0"/>
+              <a:t>Uploaded Files:</a:t>
+            </a:r>
+          </a:p>
+          <a:p>
+            <a:endParaRPr lang="en-IN" sz="2400" dirty="0"/>
+          </a:p>
+          <a:p>
+            <a:pPr marL="342900" indent="-342900">
+              <a:buFont typeface="Arial" panose="020B0604020202020204" pitchFamily="34" charset="0"/>
+              <a:buChar char="•"/>
             </a:pPr>
             <a:r>
-              <a:rPr lang="en-US" sz="2400" dirty="0">
-                <a:solidFill>
-                  <a:srgbClr val="2B3541"/>
-                </a:solidFill>
-                <a:latin typeface="Times New Roman"/>
-                <a:ea typeface="Times New Roman"/>
-                <a:cs typeface="Times New Roman"/>
-                <a:sym typeface="Times New Roman"/>
-              </a:rPr>
-              <a:t>Please test and Paste the working  </a:t>
+              <a:rPr lang="en-IN" sz="2400" dirty="0"/>
+              <a:t>PMGSY_DATASET.csv </a:t>
+            </a:r>
+          </a:p>
+          <a:p>
+            <a:pPr marL="342900" indent="-342900">
+              <a:buFont typeface="Arial" panose="020B0604020202020204" pitchFamily="34" charset="0"/>
+              <a:buChar char="•"/>
+            </a:pPr>
+            <a:r>
+              <a:rPr lang="en-IN" sz="2400" dirty="0"/>
+              <a:t>ProblemStatement.pdf </a:t>
+            </a:r>
+          </a:p>
+          <a:p>
+            <a:pPr marL="342900" indent="-342900">
+              <a:buFont typeface="Arial" panose="020B0604020202020204" pitchFamily="34" charset="0"/>
+              <a:buChar char="•"/>
+            </a:pPr>
+            <a:r>
+              <a:rPr lang="en-IN" sz="2400" dirty="0"/>
+              <a:t>ProjectPresentation.pptx </a:t>
+            </a:r>
+          </a:p>
+          <a:p>
+            <a:pPr marL="342900" indent="-342900">
+              <a:buFont typeface="Arial" panose="020B0604020202020204" pitchFamily="34" charset="0"/>
+              <a:buChar char="•"/>
+            </a:pPr>
+            <a:r>
+              <a:rPr lang="en-IN" sz="2400" dirty="0"/>
+              <a:t>Rural Infrastructure Project Classification Using </a:t>
             </a:r>
             <a:r>
-              <a:rPr lang="en-US" sz="2400" dirty="0" err="1">
-                <a:solidFill>
-                  <a:srgbClr val="2B3541"/>
-                </a:solidFill>
-                <a:latin typeface="Times New Roman"/>
-                <a:ea typeface="Times New Roman"/>
-                <a:cs typeface="Times New Roman"/>
-                <a:sym typeface="Times New Roman"/>
-              </a:rPr>
-              <a:t>Github</a:t>
+              <a:rPr lang="en-IN" sz="2400" dirty="0" err="1"/>
+              <a:t>ML.ipynb</a:t>
             </a:r>
             <a:r>
-              <a:rPr lang="en-US" sz="2400" dirty="0">
-                <a:solidFill>
-                  <a:srgbClr val="2B3541"/>
-                </a:solidFill>
-                <a:latin typeface="Times New Roman"/>
-                <a:ea typeface="Times New Roman"/>
-                <a:cs typeface="Times New Roman"/>
-                <a:sym typeface="Times New Roman"/>
-              </a:rPr>
-              <a:t> URL –</a:t>
+              <a:rPr lang="en-IN" sz="2400" dirty="0"/>
+              <a:t> </a:t>
             </a:r>
-            <a:endParaRPr lang="en-US" sz="2400" dirty="0">
-              <a:solidFill>
-                <a:srgbClr val="2B3541"/>
-              </a:solidFill>
-              <a:latin typeface="Times New Roman"/>
-              <a:ea typeface="Times New Roman"/>
-              <a:cs typeface="Times New Roman"/>
-            </a:endParaRPr>
           </a:p>
           <a:p>
-            <a:pPr>
-              <a:lnSpc>
-                <a:spcPct val="162162"/>
-              </a:lnSpc>
-              <a:buClr>
-                <a:srgbClr val="2B3541"/>
-              </a:buClr>
-              <a:buSzPts val="1850"/>
+            <a:pPr marL="342900" indent="-342900">
+              <a:buFont typeface="Arial" panose="020B0604020202020204" pitchFamily="34" charset="0"/>
+              <a:buChar char="•"/>
             </a:pPr>
             <a:r>
-              <a:rPr lang="en-US" sz="2400" b="1" dirty="0">
-                <a:solidFill>
-                  <a:srgbClr val="2B3541"/>
-                </a:solidFill>
-                <a:latin typeface="Times New Roman"/>
-                <a:ea typeface="Times New Roman"/>
-                <a:cs typeface="Times New Roman"/>
-                <a:sym typeface="Times New Roman"/>
-              </a:rPr>
-              <a:t>Make sure you have Uploaded following three files into your </a:t>
+              <a:rPr lang="en-IN" sz="2400" dirty="0"/>
+              <a:t>README.md </a:t>
             </a:r>
-            <a:r>
-              <a:rPr lang="en-US" sz="2400" b="1" dirty="0" err="1">
-                <a:solidFill>
-                  <a:srgbClr val="2B3541"/>
-                </a:solidFill>
-                <a:latin typeface="Times New Roman"/>
-                <a:ea typeface="Times New Roman"/>
-                <a:cs typeface="Times New Roman"/>
-                <a:sym typeface="Times New Roman"/>
-              </a:rPr>
-              <a:t>github</a:t>
-            </a:r>
-            <a:r>
-              <a:rPr lang="en-US" sz="2400" b="1" dirty="0">
-                <a:solidFill>
-                  <a:srgbClr val="2B3541"/>
-                </a:solidFill>
-                <a:latin typeface="Times New Roman"/>
-                <a:ea typeface="Times New Roman"/>
-                <a:cs typeface="Times New Roman"/>
-                <a:sym typeface="Times New Roman"/>
-              </a:rPr>
-              <a:t> repository  </a:t>
-            </a:r>
-            <a:br>
-              <a:rPr lang="en-US" sz="2400" dirty="0">
-                <a:latin typeface="Times New Roman"/>
-                <a:ea typeface="Times New Roman"/>
-                <a:cs typeface="Times New Roman"/>
-              </a:rPr>
-            </a:br>
-            <a:r>
-              <a:rPr lang="en-US" sz="2400" dirty="0">
-                <a:solidFill>
-                  <a:srgbClr val="2B3541"/>
-                </a:solidFill>
-                <a:latin typeface="Times New Roman"/>
-                <a:ea typeface="Times New Roman"/>
-                <a:cs typeface="Times New Roman"/>
-                <a:sym typeface="Times New Roman"/>
-              </a:rPr>
-              <a:t>1) Data.csv file, 2) yourproblemstatement.pdf file  3) your project presntation.pptx file 4) Python Notebook downloaded from IBM Cloud</a:t>
-            </a:r>
-            <a:endParaRPr lang="en-US" sz="2400" dirty="0">
-              <a:solidFill>
-                <a:srgbClr val="2B3541"/>
-              </a:solidFill>
-              <a:latin typeface="Times New Roman"/>
-              <a:ea typeface="Times New Roman"/>
-              <a:cs typeface="Times New Roman"/>
-            </a:endParaRPr>
-          </a:p>
-          <a:p>
-            <a:pPr marL="0" marR="0" lvl="0" indent="0" algn="l" rtl="0">
-              <a:lnSpc>
-                <a:spcPct val="162162"/>
-              </a:lnSpc>
-              <a:spcBef>
-                <a:spcPts val="0"/>
-              </a:spcBef>
-              <a:spcAft>
-                <a:spcPts val="0"/>
-              </a:spcAft>
-              <a:buClr>
-                <a:srgbClr val="2B3541"/>
-              </a:buClr>
-              <a:buSzPts val="1850"/>
-              <a:buFont typeface="Times New Roman"/>
-              <a:buNone/>
-            </a:pPr>
-            <a:endParaRPr sz="1850" b="0" i="0" u="none" strike="noStrike" cap="none" dirty="0">
-              <a:solidFill>
-                <a:srgbClr val="000000"/>
-              </a:solidFill>
-              <a:latin typeface="Times New Roman"/>
-              <a:ea typeface="Times New Roman"/>
-              <a:cs typeface="Times New Roman"/>
-              <a:sym typeface="Times New Roman"/>
-            </a:endParaRPr>
           </a:p>
         </p:txBody>
       </p:sp>
